--- a/docs/structure.pptx
+++ b/docs/structure.pptx
@@ -104,6 +104,11 @@
       </a:defRPr>
     </a:lvl9pPr>
   </p:defaultTextStyle>
+  <p:extLst>
+    <p:ext uri="{EFAFB233-063F-42B5-8137-9DF3F51BA10A}">
+      <p15:sldGuideLst xmlns:p15="http://schemas.microsoft.com/office/powerpoint/2012/main"/>
+    </p:ext>
+  </p:extLst>
 </p:presentation>
 </file>
 
@@ -5070,6 +5075,42 @@
           </a:p>
         </p:txBody>
       </p:sp>
+      <p:sp>
+        <p:nvSpPr>
+          <p:cNvPr id="11" name="TextBox 10">
+            <a:extLst>
+              <a:ext uri="{FF2B5EF4-FFF2-40B4-BE49-F238E27FC236}">
+                <a16:creationId xmlns:a16="http://schemas.microsoft.com/office/drawing/2014/main" id="{E39B9DDB-A7E7-1648-2ED7-2A477F4CA748}"/>
+              </a:ext>
+            </a:extLst>
+          </p:cNvPr>
+          <p:cNvSpPr txBox="1"/>
+          <p:nvPr/>
+        </p:nvSpPr>
+        <p:spPr>
+          <a:xfrm>
+            <a:off x="8937628" y="309083"/>
+            <a:ext cx="1627302" cy="369332"/>
+          </a:xfrm>
+          <a:prstGeom prst="rect">
+            <a:avLst/>
+          </a:prstGeom>
+          <a:noFill/>
+        </p:spPr>
+        <p:txBody>
+          <a:bodyPr wrap="square">
+            <a:spAutoFit/>
+          </a:bodyPr>
+          <a:lstStyle/>
+          <a:p>
+            <a:r>
+              <a:rPr lang="en" dirty="0"/>
+              <a:t>Application</a:t>
+            </a:r>
+            <a:endParaRPr lang="ru-RU" dirty="0"/>
+          </a:p>
+        </p:txBody>
+      </p:sp>
     </p:spTree>
     <p:extLst>
       <p:ext uri="{BB962C8B-B14F-4D97-AF65-F5344CB8AC3E}">

--- a/docs/structure.pptx
+++ b/docs/structure.pptx
@@ -6,6 +6,7 @@
   </p:sldMasterIdLst>
   <p:sldIdLst>
     <p:sldId id="256" r:id="rId2"/>
+    <p:sldId id="257" r:id="rId3"/>
   </p:sldIdLst>
   <p:sldSz cx="12192000" cy="6858000"/>
   <p:notesSz cx="6858000" cy="9144000"/>
@@ -259,7 +260,7 @@
           <a:p>
             <a:fld id="{525C2619-F06C-3D42-8D48-5DBF955DAB6E}" type="datetimeFigureOut">
               <a:rPr lang="ru-RU" smtClean="0"/>
-              <a:t>14.04.2026</a:t>
+              <a:t>25.05.2026</a:t>
             </a:fld>
             <a:endParaRPr lang="ru-RU"/>
           </a:p>
@@ -457,7 +458,7 @@
           <a:p>
             <a:fld id="{525C2619-F06C-3D42-8D48-5DBF955DAB6E}" type="datetimeFigureOut">
               <a:rPr lang="ru-RU" smtClean="0"/>
-              <a:t>14.04.2026</a:t>
+              <a:t>25.05.2026</a:t>
             </a:fld>
             <a:endParaRPr lang="ru-RU"/>
           </a:p>
@@ -665,7 +666,7 @@
           <a:p>
             <a:fld id="{525C2619-F06C-3D42-8D48-5DBF955DAB6E}" type="datetimeFigureOut">
               <a:rPr lang="ru-RU" smtClean="0"/>
-              <a:t>14.04.2026</a:t>
+              <a:t>25.05.2026</a:t>
             </a:fld>
             <a:endParaRPr lang="ru-RU"/>
           </a:p>
@@ -863,7 +864,7 @@
           <a:p>
             <a:fld id="{525C2619-F06C-3D42-8D48-5DBF955DAB6E}" type="datetimeFigureOut">
               <a:rPr lang="ru-RU" smtClean="0"/>
-              <a:t>14.04.2026</a:t>
+              <a:t>25.05.2026</a:t>
             </a:fld>
             <a:endParaRPr lang="ru-RU"/>
           </a:p>
@@ -1138,7 +1139,7 @@
           <a:p>
             <a:fld id="{525C2619-F06C-3D42-8D48-5DBF955DAB6E}" type="datetimeFigureOut">
               <a:rPr lang="ru-RU" smtClean="0"/>
-              <a:t>14.04.2026</a:t>
+              <a:t>25.05.2026</a:t>
             </a:fld>
             <a:endParaRPr lang="ru-RU"/>
           </a:p>
@@ -1403,7 +1404,7 @@
           <a:p>
             <a:fld id="{525C2619-F06C-3D42-8D48-5DBF955DAB6E}" type="datetimeFigureOut">
               <a:rPr lang="ru-RU" smtClean="0"/>
-              <a:t>14.04.2026</a:t>
+              <a:t>25.05.2026</a:t>
             </a:fld>
             <a:endParaRPr lang="ru-RU"/>
           </a:p>
@@ -1815,7 +1816,7 @@
           <a:p>
             <a:fld id="{525C2619-F06C-3D42-8D48-5DBF955DAB6E}" type="datetimeFigureOut">
               <a:rPr lang="ru-RU" smtClean="0"/>
-              <a:t>14.04.2026</a:t>
+              <a:t>25.05.2026</a:t>
             </a:fld>
             <a:endParaRPr lang="ru-RU"/>
           </a:p>
@@ -1956,7 +1957,7 @@
           <a:p>
             <a:fld id="{525C2619-F06C-3D42-8D48-5DBF955DAB6E}" type="datetimeFigureOut">
               <a:rPr lang="ru-RU" smtClean="0"/>
-              <a:t>14.04.2026</a:t>
+              <a:t>25.05.2026</a:t>
             </a:fld>
             <a:endParaRPr lang="ru-RU"/>
           </a:p>
@@ -2069,7 +2070,7 @@
           <a:p>
             <a:fld id="{525C2619-F06C-3D42-8D48-5DBF955DAB6E}" type="datetimeFigureOut">
               <a:rPr lang="ru-RU" smtClean="0"/>
-              <a:t>14.04.2026</a:t>
+              <a:t>25.05.2026</a:t>
             </a:fld>
             <a:endParaRPr lang="ru-RU"/>
           </a:p>
@@ -2380,7 +2381,7 @@
           <a:p>
             <a:fld id="{525C2619-F06C-3D42-8D48-5DBF955DAB6E}" type="datetimeFigureOut">
               <a:rPr lang="ru-RU" smtClean="0"/>
-              <a:t>14.04.2026</a:t>
+              <a:t>25.05.2026</a:t>
             </a:fld>
             <a:endParaRPr lang="ru-RU"/>
           </a:p>
@@ -2668,7 +2669,7 @@
           <a:p>
             <a:fld id="{525C2619-F06C-3D42-8D48-5DBF955DAB6E}" type="datetimeFigureOut">
               <a:rPr lang="ru-RU" smtClean="0"/>
-              <a:t>14.04.2026</a:t>
+              <a:t>25.05.2026</a:t>
             </a:fld>
             <a:endParaRPr lang="ru-RU"/>
           </a:p>
@@ -2909,7 +2910,7 @@
           <a:p>
             <a:fld id="{525C2619-F06C-3D42-8D48-5DBF955DAB6E}" type="datetimeFigureOut">
               <a:rPr lang="ru-RU" smtClean="0"/>
-              <a:t>14.04.2026</a:t>
+              <a:t>25.05.2026</a:t>
             </a:fld>
             <a:endParaRPr lang="ru-RU"/>
           </a:p>
@@ -5124,6 +5125,1791 @@
 </p:sld>
 </file>
 
+<file path=ppt/slides/slide2.xml><?xml version="1.0" encoding="utf-8"?>
+<p:sld xmlns:a="http://schemas.openxmlformats.org/drawingml/2006/main" xmlns:r="http://schemas.openxmlformats.org/officeDocument/2006/relationships" xmlns:p="http://schemas.openxmlformats.org/presentationml/2006/main">
+  <p:cSld>
+    <p:spTree>
+      <p:nvGrpSpPr>
+        <p:cNvPr id="1" name=""/>
+        <p:cNvGrpSpPr/>
+        <p:nvPr/>
+      </p:nvGrpSpPr>
+      <p:grpSpPr>
+        <a:xfrm>
+          <a:off x="0" y="0"/>
+          <a:ext cx="0" cy="0"/>
+          <a:chOff x="0" y="0"/>
+          <a:chExt cx="0" cy="0"/>
+        </a:xfrm>
+      </p:grpSpPr>
+      <p:sp>
+        <p:nvSpPr>
+          <p:cNvPr id="4" name="Загнутый угол 3">
+            <a:extLst>
+              <a:ext uri="{FF2B5EF4-FFF2-40B4-BE49-F238E27FC236}">
+                <a16:creationId xmlns:a16="http://schemas.microsoft.com/office/drawing/2014/main" id="{D5013EFA-51BC-A2AC-4A2D-5DAED06C2F55}"/>
+              </a:ext>
+            </a:extLst>
+          </p:cNvPr>
+          <p:cNvSpPr/>
+          <p:nvPr/>
+        </p:nvSpPr>
+        <p:spPr>
+          <a:xfrm rot="10800000">
+            <a:off x="943452" y="537129"/>
+            <a:ext cx="982639" cy="1129352"/>
+          </a:xfrm>
+          <a:prstGeom prst="foldedCorner">
+            <a:avLst/>
+          </a:prstGeom>
+          <a:solidFill>
+            <a:schemeClr val="bg2"/>
+          </a:solidFill>
+        </p:spPr>
+        <p:style>
+          <a:lnRef idx="2">
+            <a:schemeClr val="accent1">
+              <a:shade val="15000"/>
+            </a:schemeClr>
+          </a:lnRef>
+          <a:fillRef idx="1">
+            <a:schemeClr val="accent1"/>
+          </a:fillRef>
+          <a:effectRef idx="0">
+            <a:schemeClr val="accent1"/>
+          </a:effectRef>
+          <a:fontRef idx="minor">
+            <a:schemeClr val="lt1"/>
+          </a:fontRef>
+        </p:style>
+        <p:txBody>
+          <a:bodyPr rtlCol="0" anchor="ctr"/>
+          <a:lstStyle/>
+          <a:p>
+            <a:pPr algn="ctr"/>
+            <a:endParaRPr lang="ru-RU" dirty="0"/>
+          </a:p>
+        </p:txBody>
+      </p:sp>
+      <p:sp>
+        <p:nvSpPr>
+          <p:cNvPr id="5" name="TextBox 4">
+            <a:extLst>
+              <a:ext uri="{FF2B5EF4-FFF2-40B4-BE49-F238E27FC236}">
+                <a16:creationId xmlns:a16="http://schemas.microsoft.com/office/drawing/2014/main" id="{1287F35D-A686-825C-296A-92809F9C0763}"/>
+              </a:ext>
+            </a:extLst>
+          </p:cNvPr>
+          <p:cNvSpPr txBox="1"/>
+          <p:nvPr/>
+        </p:nvSpPr>
+        <p:spPr>
+          <a:xfrm>
+            <a:off x="980880" y="833231"/>
+            <a:ext cx="876971" cy="646331"/>
+          </a:xfrm>
+          <a:prstGeom prst="rect">
+            <a:avLst/>
+          </a:prstGeom>
+          <a:noFill/>
+        </p:spPr>
+        <p:txBody>
+          <a:bodyPr wrap="none" rtlCol="0">
+            <a:spAutoFit/>
+          </a:bodyPr>
+          <a:lstStyle/>
+          <a:p>
+            <a:pPr algn="ctr"/>
+            <a:r>
+              <a:rPr lang="en-US" dirty="0"/>
+              <a:t>Source </a:t>
+            </a:r>
+          </a:p>
+          <a:p>
+            <a:pPr algn="ctr"/>
+            <a:r>
+              <a:rPr lang="en-US" dirty="0"/>
+              <a:t>model</a:t>
+            </a:r>
+            <a:endParaRPr lang="ru-RU" dirty="0"/>
+          </a:p>
+        </p:txBody>
+      </p:sp>
+      <p:sp>
+        <p:nvSpPr>
+          <p:cNvPr id="6" name="Загнутый угол 5">
+            <a:extLst>
+              <a:ext uri="{FF2B5EF4-FFF2-40B4-BE49-F238E27FC236}">
+                <a16:creationId xmlns:a16="http://schemas.microsoft.com/office/drawing/2014/main" id="{07597537-7AE1-6B34-690D-9EE5922F22D4}"/>
+              </a:ext>
+            </a:extLst>
+          </p:cNvPr>
+          <p:cNvSpPr/>
+          <p:nvPr/>
+        </p:nvSpPr>
+        <p:spPr>
+          <a:xfrm rot="10800000">
+            <a:off x="2949673" y="2128799"/>
+            <a:ext cx="982639" cy="1129352"/>
+          </a:xfrm>
+          <a:prstGeom prst="foldedCorner">
+            <a:avLst/>
+          </a:prstGeom>
+          <a:solidFill>
+            <a:schemeClr val="bg2"/>
+          </a:solidFill>
+        </p:spPr>
+        <p:style>
+          <a:lnRef idx="2">
+            <a:schemeClr val="accent1">
+              <a:shade val="15000"/>
+            </a:schemeClr>
+          </a:lnRef>
+          <a:fillRef idx="1">
+            <a:schemeClr val="accent1"/>
+          </a:fillRef>
+          <a:effectRef idx="0">
+            <a:schemeClr val="accent1"/>
+          </a:effectRef>
+          <a:fontRef idx="minor">
+            <a:schemeClr val="lt1"/>
+          </a:fontRef>
+        </p:style>
+        <p:txBody>
+          <a:bodyPr rtlCol="0" anchor="ctr"/>
+          <a:lstStyle/>
+          <a:p>
+            <a:pPr algn="ctr"/>
+            <a:endParaRPr lang="ru-RU" dirty="0"/>
+          </a:p>
+        </p:txBody>
+      </p:sp>
+      <p:sp>
+        <p:nvSpPr>
+          <p:cNvPr id="7" name="TextBox 6">
+            <a:extLst>
+              <a:ext uri="{FF2B5EF4-FFF2-40B4-BE49-F238E27FC236}">
+                <a16:creationId xmlns:a16="http://schemas.microsoft.com/office/drawing/2014/main" id="{0EF5C068-66DE-BA1E-47CA-9D73A28B4F08}"/>
+              </a:ext>
+            </a:extLst>
+          </p:cNvPr>
+          <p:cNvSpPr txBox="1"/>
+          <p:nvPr/>
+        </p:nvSpPr>
+        <p:spPr>
+          <a:xfrm>
+            <a:off x="2949673" y="2370308"/>
+            <a:ext cx="950902" cy="646331"/>
+          </a:xfrm>
+          <a:prstGeom prst="rect">
+            <a:avLst/>
+          </a:prstGeom>
+          <a:noFill/>
+        </p:spPr>
+        <p:txBody>
+          <a:bodyPr wrap="none" rtlCol="0">
+            <a:spAutoFit/>
+          </a:bodyPr>
+          <a:lstStyle/>
+          <a:p>
+            <a:pPr algn="ctr"/>
+            <a:r>
+              <a:rPr lang="en-US" dirty="0"/>
+              <a:t>Custom </a:t>
+            </a:r>
+          </a:p>
+          <a:p>
+            <a:pPr algn="ctr"/>
+            <a:r>
+              <a:rPr lang="en-US" dirty="0"/>
+              <a:t>model</a:t>
+            </a:r>
+            <a:endParaRPr lang="ru-RU" dirty="0"/>
+          </a:p>
+        </p:txBody>
+      </p:sp>
+      <p:sp>
+        <p:nvSpPr>
+          <p:cNvPr id="8" name="Типовой процесс 7">
+            <a:extLst>
+              <a:ext uri="{FF2B5EF4-FFF2-40B4-BE49-F238E27FC236}">
+                <a16:creationId xmlns:a16="http://schemas.microsoft.com/office/drawing/2014/main" id="{D05F0274-1D2E-F952-C46E-3B228022878F}"/>
+              </a:ext>
+            </a:extLst>
+          </p:cNvPr>
+          <p:cNvSpPr/>
+          <p:nvPr/>
+        </p:nvSpPr>
+        <p:spPr>
+          <a:xfrm>
+            <a:off x="418013" y="2128798"/>
+            <a:ext cx="2033517" cy="1129353"/>
+          </a:xfrm>
+          <a:prstGeom prst="flowChartPredefinedProcess">
+            <a:avLst/>
+          </a:prstGeom>
+          <a:solidFill>
+            <a:schemeClr val="accent6">
+              <a:lumMod val="40000"/>
+              <a:lumOff val="60000"/>
+            </a:schemeClr>
+          </a:solidFill>
+        </p:spPr>
+        <p:style>
+          <a:lnRef idx="2">
+            <a:schemeClr val="accent1">
+              <a:shade val="15000"/>
+            </a:schemeClr>
+          </a:lnRef>
+          <a:fillRef idx="1">
+            <a:schemeClr val="accent1"/>
+          </a:fillRef>
+          <a:effectRef idx="0">
+            <a:schemeClr val="accent1"/>
+          </a:effectRef>
+          <a:fontRef idx="minor">
+            <a:schemeClr val="lt1"/>
+          </a:fontRef>
+        </p:style>
+        <p:txBody>
+          <a:bodyPr rtlCol="0" anchor="ctr"/>
+          <a:lstStyle/>
+          <a:p>
+            <a:pPr algn="ctr"/>
+            <a:r>
+              <a:rPr lang="en-US" dirty="0">
+                <a:solidFill>
+                  <a:schemeClr val="tx1"/>
+                </a:solidFill>
+              </a:rPr>
+              <a:t>keras2nmp</a:t>
+            </a:r>
+            <a:endParaRPr lang="ru-RU" dirty="0">
+              <a:solidFill>
+                <a:schemeClr val="tx1"/>
+              </a:solidFill>
+            </a:endParaRPr>
+          </a:p>
+        </p:txBody>
+      </p:sp>
+      <p:cxnSp>
+        <p:nvCxnSpPr>
+          <p:cNvPr id="10" name="Прямая со стрелкой 9">
+            <a:extLst>
+              <a:ext uri="{FF2B5EF4-FFF2-40B4-BE49-F238E27FC236}">
+                <a16:creationId xmlns:a16="http://schemas.microsoft.com/office/drawing/2014/main" id="{832843C6-0236-3178-EC7F-3D5F4D2704F8}"/>
+              </a:ext>
+            </a:extLst>
+          </p:cNvPr>
+          <p:cNvCxnSpPr>
+            <a:stCxn id="4" idx="0"/>
+            <a:endCxn id="8" idx="0"/>
+          </p:cNvCxnSpPr>
+          <p:nvPr/>
+        </p:nvCxnSpPr>
+        <p:spPr>
+          <a:xfrm>
+            <a:off x="1434771" y="1666481"/>
+            <a:ext cx="1" cy="462317"/>
+          </a:xfrm>
+          <a:prstGeom prst="straightConnector1">
+            <a:avLst/>
+          </a:prstGeom>
+          <a:ln w="38100">
+            <a:tailEnd type="triangle"/>
+          </a:ln>
+        </p:spPr>
+        <p:style>
+          <a:lnRef idx="1">
+            <a:schemeClr val="accent1"/>
+          </a:lnRef>
+          <a:fillRef idx="0">
+            <a:schemeClr val="accent1"/>
+          </a:fillRef>
+          <a:effectRef idx="0">
+            <a:schemeClr val="accent1"/>
+          </a:effectRef>
+          <a:fontRef idx="minor">
+            <a:schemeClr val="tx1"/>
+          </a:fontRef>
+        </p:style>
+      </p:cxnSp>
+      <p:cxnSp>
+        <p:nvCxnSpPr>
+          <p:cNvPr id="13" name="Прямая со стрелкой 12">
+            <a:extLst>
+              <a:ext uri="{FF2B5EF4-FFF2-40B4-BE49-F238E27FC236}">
+                <a16:creationId xmlns:a16="http://schemas.microsoft.com/office/drawing/2014/main" id="{4E6C676A-5D86-F251-1A5B-3E706CAC71CD}"/>
+              </a:ext>
+            </a:extLst>
+          </p:cNvPr>
+          <p:cNvCxnSpPr>
+            <a:cxnSpLocks/>
+            <a:stCxn id="8" idx="3"/>
+            <a:endCxn id="6" idx="3"/>
+          </p:cNvCxnSpPr>
+          <p:nvPr/>
+        </p:nvCxnSpPr>
+        <p:spPr>
+          <a:xfrm>
+            <a:off x="2451530" y="2693475"/>
+            <a:ext cx="498143" cy="0"/>
+          </a:xfrm>
+          <a:prstGeom prst="straightConnector1">
+            <a:avLst/>
+          </a:prstGeom>
+          <a:ln w="38100">
+            <a:tailEnd type="triangle"/>
+          </a:ln>
+        </p:spPr>
+        <p:style>
+          <a:lnRef idx="1">
+            <a:schemeClr val="accent1"/>
+          </a:lnRef>
+          <a:fillRef idx="0">
+            <a:schemeClr val="accent1"/>
+          </a:fillRef>
+          <a:effectRef idx="0">
+            <a:schemeClr val="accent1"/>
+          </a:effectRef>
+          <a:fontRef idx="minor">
+            <a:schemeClr val="tx1"/>
+          </a:fontRef>
+        </p:style>
+      </p:cxnSp>
+      <p:sp>
+        <p:nvSpPr>
+          <p:cNvPr id="17" name="TextBox 16">
+            <a:extLst>
+              <a:ext uri="{FF2B5EF4-FFF2-40B4-BE49-F238E27FC236}">
+                <a16:creationId xmlns:a16="http://schemas.microsoft.com/office/drawing/2014/main" id="{79AD908C-6F77-5FCE-019D-BDEF5DF6151A}"/>
+              </a:ext>
+            </a:extLst>
+          </p:cNvPr>
+          <p:cNvSpPr txBox="1"/>
+          <p:nvPr/>
+        </p:nvSpPr>
+        <p:spPr>
+          <a:xfrm>
+            <a:off x="2014292" y="1729497"/>
+            <a:ext cx="1379224" cy="369332"/>
+          </a:xfrm>
+          <a:prstGeom prst="rect">
+            <a:avLst/>
+          </a:prstGeom>
+          <a:noFill/>
+        </p:spPr>
+        <p:txBody>
+          <a:bodyPr wrap="none" rtlCol="0">
+            <a:spAutoFit/>
+          </a:bodyPr>
+          <a:lstStyle/>
+          <a:p>
+            <a:r>
+              <a:rPr lang="en" dirty="0"/>
+              <a:t>Converting</a:t>
+            </a:r>
+            <a:r>
+              <a:rPr lang="ru-RU" dirty="0"/>
+              <a:t>…</a:t>
+            </a:r>
+            <a:endParaRPr lang="en-US" dirty="0"/>
+          </a:p>
+        </p:txBody>
+      </p:sp>
+      <p:sp>
+        <p:nvSpPr>
+          <p:cNvPr id="18" name="Несколько документов 17">
+            <a:extLst>
+              <a:ext uri="{FF2B5EF4-FFF2-40B4-BE49-F238E27FC236}">
+                <a16:creationId xmlns:a16="http://schemas.microsoft.com/office/drawing/2014/main" id="{B0631B9B-8268-74B8-440B-E6157EBCB9EF}"/>
+              </a:ext>
+            </a:extLst>
+          </p:cNvPr>
+          <p:cNvSpPr/>
+          <p:nvPr/>
+        </p:nvSpPr>
+        <p:spPr>
+          <a:xfrm>
+            <a:off x="382135" y="3822827"/>
+            <a:ext cx="1837380" cy="1460310"/>
+          </a:xfrm>
+          <a:prstGeom prst="flowChartMultidocument">
+            <a:avLst/>
+          </a:prstGeom>
+          <a:solidFill>
+            <a:schemeClr val="accent4">
+              <a:lumMod val="20000"/>
+              <a:lumOff val="80000"/>
+            </a:schemeClr>
+          </a:solidFill>
+        </p:spPr>
+        <p:style>
+          <a:lnRef idx="2">
+            <a:schemeClr val="accent1">
+              <a:shade val="15000"/>
+            </a:schemeClr>
+          </a:lnRef>
+          <a:fillRef idx="1">
+            <a:schemeClr val="accent1"/>
+          </a:fillRef>
+          <a:effectRef idx="0">
+            <a:schemeClr val="accent1"/>
+          </a:effectRef>
+          <a:fontRef idx="minor">
+            <a:schemeClr val="lt1"/>
+          </a:fontRef>
+        </p:style>
+        <p:txBody>
+          <a:bodyPr rtlCol="0" anchor="ctr"/>
+          <a:lstStyle/>
+          <a:p>
+            <a:pPr algn="ctr"/>
+            <a:r>
+              <a:rPr lang="ru-RU" dirty="0" err="1">
+                <a:solidFill>
+                  <a:schemeClr val="tx1"/>
+                </a:solidFill>
+              </a:rPr>
+              <a:t>c</a:t>
+            </a:r>
+            <a:r>
+              <a:rPr lang="en-US" dirty="0" err="1">
+                <a:solidFill>
+                  <a:schemeClr val="tx1"/>
+                </a:solidFill>
+              </a:rPr>
+              <a:t>omponents</a:t>
+            </a:r>
+            <a:endParaRPr lang="ru-RU" dirty="0">
+              <a:solidFill>
+                <a:schemeClr val="tx1"/>
+              </a:solidFill>
+            </a:endParaRPr>
+          </a:p>
+        </p:txBody>
+      </p:sp>
+      <p:cxnSp>
+        <p:nvCxnSpPr>
+          <p:cNvPr id="19" name="Прямая со стрелкой 18">
+            <a:extLst>
+              <a:ext uri="{FF2B5EF4-FFF2-40B4-BE49-F238E27FC236}">
+                <a16:creationId xmlns:a16="http://schemas.microsoft.com/office/drawing/2014/main" id="{D1F7CB93-A8C9-2FE7-A89B-547865EC02C0}"/>
+              </a:ext>
+            </a:extLst>
+          </p:cNvPr>
+          <p:cNvCxnSpPr>
+            <a:cxnSpLocks/>
+            <a:stCxn id="18" idx="0"/>
+            <a:endCxn id="8" idx="2"/>
+          </p:cNvCxnSpPr>
+          <p:nvPr/>
+        </p:nvCxnSpPr>
+        <p:spPr>
+          <a:xfrm flipV="1">
+            <a:off x="1427230" y="3258151"/>
+            <a:ext cx="7542" cy="564676"/>
+          </a:xfrm>
+          <a:prstGeom prst="straightConnector1">
+            <a:avLst/>
+          </a:prstGeom>
+          <a:ln w="38100">
+            <a:tailEnd type="triangle"/>
+          </a:ln>
+        </p:spPr>
+        <p:style>
+          <a:lnRef idx="1">
+            <a:schemeClr val="accent1"/>
+          </a:lnRef>
+          <a:fillRef idx="0">
+            <a:schemeClr val="accent1"/>
+          </a:fillRef>
+          <a:effectRef idx="0">
+            <a:schemeClr val="accent1"/>
+          </a:effectRef>
+          <a:fontRef idx="minor">
+            <a:schemeClr val="tx1"/>
+          </a:fontRef>
+        </p:style>
+      </p:cxnSp>
+      <p:sp>
+        <p:nvSpPr>
+          <p:cNvPr id="25" name="TextBox 24">
+            <a:extLst>
+              <a:ext uri="{FF2B5EF4-FFF2-40B4-BE49-F238E27FC236}">
+                <a16:creationId xmlns:a16="http://schemas.microsoft.com/office/drawing/2014/main" id="{C44DBFB6-6BDD-756C-D62A-EB05A5FDC9B8}"/>
+              </a:ext>
+            </a:extLst>
+          </p:cNvPr>
+          <p:cNvSpPr txBox="1"/>
+          <p:nvPr/>
+        </p:nvSpPr>
+        <p:spPr>
+          <a:xfrm>
+            <a:off x="374850" y="5283137"/>
+            <a:ext cx="1439393" cy="1200329"/>
+          </a:xfrm>
+          <a:prstGeom prst="rect">
+            <a:avLst/>
+          </a:prstGeom>
+          <a:noFill/>
+        </p:spPr>
+        <p:txBody>
+          <a:bodyPr wrap="square">
+            <a:spAutoFit/>
+          </a:bodyPr>
+          <a:lstStyle/>
+          <a:p>
+            <a:r>
+              <a:rPr lang="en" dirty="0"/>
+              <a:t>Sequential, </a:t>
+            </a:r>
+          </a:p>
+          <a:p>
+            <a:r>
+              <a:rPr lang="en" dirty="0"/>
+              <a:t>Dense, </a:t>
+            </a:r>
+          </a:p>
+          <a:p>
+            <a:r>
+              <a:rPr lang="en" dirty="0"/>
+              <a:t>Conv2D, </a:t>
+            </a:r>
+          </a:p>
+          <a:p>
+            <a:r>
+              <a:rPr lang="en" dirty="0"/>
+              <a:t>Flatten</a:t>
+            </a:r>
+            <a:endParaRPr lang="ru-RU" dirty="0"/>
+          </a:p>
+        </p:txBody>
+      </p:sp>
+      <p:sp>
+        <p:nvSpPr>
+          <p:cNvPr id="26" name="TextBox 25">
+            <a:extLst>
+              <a:ext uri="{FF2B5EF4-FFF2-40B4-BE49-F238E27FC236}">
+                <a16:creationId xmlns:a16="http://schemas.microsoft.com/office/drawing/2014/main" id="{2B36D941-511D-E100-1E51-0D9FD79DAEC6}"/>
+              </a:ext>
+            </a:extLst>
+          </p:cNvPr>
+          <p:cNvSpPr txBox="1"/>
+          <p:nvPr/>
+        </p:nvSpPr>
+        <p:spPr>
+          <a:xfrm>
+            <a:off x="2340704" y="3288120"/>
+            <a:ext cx="1815153" cy="923330"/>
+          </a:xfrm>
+          <a:prstGeom prst="rect">
+            <a:avLst/>
+          </a:prstGeom>
+          <a:noFill/>
+        </p:spPr>
+        <p:txBody>
+          <a:bodyPr wrap="square" rtlCol="0">
+            <a:spAutoFit/>
+          </a:bodyPr>
+          <a:lstStyle/>
+          <a:p>
+            <a:r>
+              <a:rPr lang="en" dirty="0"/>
+              <a:t>Override the </a:t>
+            </a:r>
+            <a:r>
+              <a:rPr lang="en" dirty="0" err="1"/>
+              <a:t>matmul</a:t>
+            </a:r>
+            <a:r>
+              <a:rPr lang="en" dirty="0"/>
+              <a:t> method for the layer</a:t>
+            </a:r>
+            <a:endParaRPr lang="ru-RU" dirty="0"/>
+          </a:p>
+        </p:txBody>
+      </p:sp>
+      <p:sp>
+        <p:nvSpPr>
+          <p:cNvPr id="28" name="Прямоугольник 27">
+            <a:extLst>
+              <a:ext uri="{FF2B5EF4-FFF2-40B4-BE49-F238E27FC236}">
+                <a16:creationId xmlns:a16="http://schemas.microsoft.com/office/drawing/2014/main" id="{180BC992-35EF-CA2B-B32A-69717701D7C2}"/>
+              </a:ext>
+            </a:extLst>
+          </p:cNvPr>
+          <p:cNvSpPr/>
+          <p:nvPr/>
+        </p:nvSpPr>
+        <p:spPr>
+          <a:xfrm>
+            <a:off x="232012" y="393825"/>
+            <a:ext cx="3843601" cy="6089641"/>
+          </a:xfrm>
+          <a:prstGeom prst="rect">
+            <a:avLst/>
+          </a:prstGeom>
+          <a:noFill/>
+          <a:ln>
+            <a:prstDash val="dash"/>
+          </a:ln>
+        </p:spPr>
+        <p:style>
+          <a:lnRef idx="2">
+            <a:schemeClr val="accent1">
+              <a:shade val="15000"/>
+            </a:schemeClr>
+          </a:lnRef>
+          <a:fillRef idx="1">
+            <a:schemeClr val="accent1"/>
+          </a:fillRef>
+          <a:effectRef idx="0">
+            <a:schemeClr val="accent1"/>
+          </a:effectRef>
+          <a:fontRef idx="minor">
+            <a:schemeClr val="lt1"/>
+          </a:fontRef>
+        </p:style>
+        <p:txBody>
+          <a:bodyPr rtlCol="0" anchor="ctr"/>
+          <a:lstStyle/>
+          <a:p>
+            <a:pPr algn="ctr"/>
+            <a:endParaRPr lang="ru-RU"/>
+          </a:p>
+        </p:txBody>
+      </p:sp>
+      <p:sp>
+        <p:nvSpPr>
+          <p:cNvPr id="29" name="TextBox 28">
+            <a:extLst>
+              <a:ext uri="{FF2B5EF4-FFF2-40B4-BE49-F238E27FC236}">
+                <a16:creationId xmlns:a16="http://schemas.microsoft.com/office/drawing/2014/main" id="{7B2E1B93-06F7-BD5A-1FA7-EFFCAC045DC0}"/>
+              </a:ext>
+            </a:extLst>
+          </p:cNvPr>
+          <p:cNvSpPr txBox="1"/>
+          <p:nvPr/>
+        </p:nvSpPr>
+        <p:spPr>
+          <a:xfrm>
+            <a:off x="41226" y="12067"/>
+            <a:ext cx="4356577" cy="369332"/>
+          </a:xfrm>
+          <a:prstGeom prst="rect">
+            <a:avLst/>
+          </a:prstGeom>
+          <a:noFill/>
+        </p:spPr>
+        <p:txBody>
+          <a:bodyPr wrap="none" rtlCol="0">
+            <a:spAutoFit/>
+          </a:bodyPr>
+          <a:lstStyle/>
+          <a:p>
+            <a:r>
+              <a:rPr lang="en" dirty="0"/>
+              <a:t>This code runs on a PC with TensorFlow (TF)</a:t>
+            </a:r>
+            <a:endParaRPr lang="ru-RU" dirty="0"/>
+          </a:p>
+        </p:txBody>
+      </p:sp>
+      <p:sp>
+        <p:nvSpPr>
+          <p:cNvPr id="30" name="Вертикальный свиток 29">
+            <a:extLst>
+              <a:ext uri="{FF2B5EF4-FFF2-40B4-BE49-F238E27FC236}">
+                <a16:creationId xmlns:a16="http://schemas.microsoft.com/office/drawing/2014/main" id="{32D5807D-0FC3-8855-CD3B-E5B2D0768831}"/>
+              </a:ext>
+            </a:extLst>
+          </p:cNvPr>
+          <p:cNvSpPr/>
+          <p:nvPr/>
+        </p:nvSpPr>
+        <p:spPr>
+          <a:xfrm>
+            <a:off x="4537802" y="2641499"/>
+            <a:ext cx="2002191" cy="2508744"/>
+          </a:xfrm>
+          <a:prstGeom prst="verticalScroll">
+            <a:avLst/>
+          </a:prstGeom>
+          <a:solidFill>
+            <a:schemeClr val="accent1">
+              <a:lumMod val="20000"/>
+              <a:lumOff val="80000"/>
+            </a:schemeClr>
+          </a:solidFill>
+        </p:spPr>
+        <p:style>
+          <a:lnRef idx="2">
+            <a:schemeClr val="accent1">
+              <a:shade val="15000"/>
+            </a:schemeClr>
+          </a:lnRef>
+          <a:fillRef idx="1">
+            <a:schemeClr val="accent1"/>
+          </a:fillRef>
+          <a:effectRef idx="0">
+            <a:schemeClr val="accent1"/>
+          </a:effectRef>
+          <a:fontRef idx="minor">
+            <a:schemeClr val="lt1"/>
+          </a:fontRef>
+        </p:style>
+        <p:txBody>
+          <a:bodyPr rtlCol="0" anchor="ctr"/>
+          <a:lstStyle/>
+          <a:p>
+            <a:pPr algn="ctr"/>
+            <a:r>
+              <a:rPr lang="en" b="1" dirty="0">
+                <a:solidFill>
+                  <a:schemeClr val="tx1"/>
+                </a:solidFill>
+              </a:rPr>
+              <a:t>Neural network inference script</a:t>
+            </a:r>
+            <a:endParaRPr lang="ru-RU" dirty="0">
+              <a:solidFill>
+                <a:schemeClr val="tx1"/>
+              </a:solidFill>
+            </a:endParaRPr>
+          </a:p>
+        </p:txBody>
+      </p:sp>
+      <p:cxnSp>
+        <p:nvCxnSpPr>
+          <p:cNvPr id="32" name="Соединительная линия уступом 31">
+            <a:extLst>
+              <a:ext uri="{FF2B5EF4-FFF2-40B4-BE49-F238E27FC236}">
+                <a16:creationId xmlns:a16="http://schemas.microsoft.com/office/drawing/2014/main" id="{194A1D4C-4E73-710F-9964-4D87006FCD71}"/>
+              </a:ext>
+            </a:extLst>
+          </p:cNvPr>
+          <p:cNvCxnSpPr>
+            <a:cxnSpLocks/>
+            <a:stCxn id="18" idx="3"/>
+            <a:endCxn id="30" idx="1"/>
+          </p:cNvCxnSpPr>
+          <p:nvPr/>
+        </p:nvCxnSpPr>
+        <p:spPr>
+          <a:xfrm flipV="1">
+            <a:off x="2219515" y="3895871"/>
+            <a:ext cx="2568561" cy="657111"/>
+          </a:xfrm>
+          <a:prstGeom prst="bentConnector5">
+            <a:avLst>
+              <a:gd name="adj1" fmla="val 45128"/>
+              <a:gd name="adj2" fmla="val 230"/>
+              <a:gd name="adj3" fmla="val 85081"/>
+            </a:avLst>
+          </a:prstGeom>
+          <a:ln w="38100">
+            <a:tailEnd type="triangle"/>
+          </a:ln>
+        </p:spPr>
+        <p:style>
+          <a:lnRef idx="1">
+            <a:schemeClr val="accent1"/>
+          </a:lnRef>
+          <a:fillRef idx="0">
+            <a:schemeClr val="accent1"/>
+          </a:fillRef>
+          <a:effectRef idx="0">
+            <a:schemeClr val="accent1"/>
+          </a:effectRef>
+          <a:fontRef idx="minor">
+            <a:schemeClr val="tx1"/>
+          </a:fontRef>
+        </p:style>
+      </p:cxnSp>
+      <p:sp>
+        <p:nvSpPr>
+          <p:cNvPr id="34" name="TextBox 33">
+            <a:extLst>
+              <a:ext uri="{FF2B5EF4-FFF2-40B4-BE49-F238E27FC236}">
+                <a16:creationId xmlns:a16="http://schemas.microsoft.com/office/drawing/2014/main" id="{CA4CD035-41CF-D569-B7A5-D3066992A400}"/>
+              </a:ext>
+            </a:extLst>
+          </p:cNvPr>
+          <p:cNvSpPr txBox="1"/>
+          <p:nvPr/>
+        </p:nvSpPr>
+        <p:spPr>
+          <a:xfrm>
+            <a:off x="2408749" y="4591396"/>
+            <a:ext cx="1837380" cy="369332"/>
+          </a:xfrm>
+          <a:prstGeom prst="rect">
+            <a:avLst/>
+          </a:prstGeom>
+          <a:noFill/>
+        </p:spPr>
+        <p:txBody>
+          <a:bodyPr wrap="square">
+            <a:spAutoFit/>
+          </a:bodyPr>
+          <a:lstStyle/>
+          <a:p>
+            <a:r>
+              <a:rPr lang="en" dirty="0"/>
+              <a:t>1. </a:t>
+            </a:r>
+            <a:r>
+              <a:rPr lang="en" dirty="0" err="1"/>
+              <a:t>load_model</a:t>
+            </a:r>
+            <a:endParaRPr lang="ru-RU" dirty="0"/>
+          </a:p>
+        </p:txBody>
+      </p:sp>
+      <p:sp>
+        <p:nvSpPr>
+          <p:cNvPr id="35" name="Несколько документов 34">
+            <a:extLst>
+              <a:ext uri="{FF2B5EF4-FFF2-40B4-BE49-F238E27FC236}">
+                <a16:creationId xmlns:a16="http://schemas.microsoft.com/office/drawing/2014/main" id="{8441FDB9-ED77-2549-7EB8-8C9D2C16FC35}"/>
+              </a:ext>
+            </a:extLst>
+          </p:cNvPr>
+          <p:cNvSpPr/>
+          <p:nvPr/>
+        </p:nvSpPr>
+        <p:spPr>
+          <a:xfrm>
+            <a:off x="7404222" y="3161406"/>
+            <a:ext cx="1837380" cy="1460310"/>
+          </a:xfrm>
+          <a:prstGeom prst="flowChartMultidocument">
+            <a:avLst/>
+          </a:prstGeom>
+          <a:solidFill>
+            <a:schemeClr val="accent4">
+              <a:lumMod val="20000"/>
+              <a:lumOff val="80000"/>
+            </a:schemeClr>
+          </a:solidFill>
+        </p:spPr>
+        <p:style>
+          <a:lnRef idx="2">
+            <a:schemeClr val="accent1">
+              <a:shade val="15000"/>
+            </a:schemeClr>
+          </a:lnRef>
+          <a:fillRef idx="1">
+            <a:schemeClr val="accent1"/>
+          </a:fillRef>
+          <a:effectRef idx="0">
+            <a:schemeClr val="accent1"/>
+          </a:effectRef>
+          <a:fontRef idx="minor">
+            <a:schemeClr val="lt1"/>
+          </a:fontRef>
+        </p:style>
+        <p:txBody>
+          <a:bodyPr rtlCol="0" anchor="ctr"/>
+          <a:lstStyle/>
+          <a:p>
+            <a:pPr algn="ctr"/>
+            <a:r>
+              <a:rPr lang="en-US" dirty="0" err="1">
+                <a:solidFill>
+                  <a:schemeClr val="tx1"/>
+                </a:solidFill>
+              </a:rPr>
+              <a:t>hardlayers</a:t>
+            </a:r>
+            <a:endParaRPr lang="ru-RU" dirty="0">
+              <a:solidFill>
+                <a:schemeClr val="tx1"/>
+              </a:solidFill>
+            </a:endParaRPr>
+          </a:p>
+        </p:txBody>
+      </p:sp>
+      <p:sp>
+        <p:nvSpPr>
+          <p:cNvPr id="36" name="Альтернативный процесс 35">
+            <a:extLst>
+              <a:ext uri="{FF2B5EF4-FFF2-40B4-BE49-F238E27FC236}">
+                <a16:creationId xmlns:a16="http://schemas.microsoft.com/office/drawing/2014/main" id="{D0ADD028-91C3-454F-5EB9-20821F57C93E}"/>
+              </a:ext>
+            </a:extLst>
+          </p:cNvPr>
+          <p:cNvSpPr/>
+          <p:nvPr/>
+        </p:nvSpPr>
+        <p:spPr>
+          <a:xfrm>
+            <a:off x="10417611" y="1243561"/>
+            <a:ext cx="1595132" cy="899786"/>
+          </a:xfrm>
+          <a:prstGeom prst="flowChartAlternateProcess">
+            <a:avLst/>
+          </a:prstGeom>
+          <a:solidFill>
+            <a:schemeClr val="tx2">
+              <a:lumMod val="60000"/>
+              <a:lumOff val="40000"/>
+            </a:schemeClr>
+          </a:solidFill>
+        </p:spPr>
+        <p:style>
+          <a:lnRef idx="2">
+            <a:schemeClr val="accent1">
+              <a:shade val="15000"/>
+            </a:schemeClr>
+          </a:lnRef>
+          <a:fillRef idx="1">
+            <a:schemeClr val="accent1"/>
+          </a:fillRef>
+          <a:effectRef idx="0">
+            <a:schemeClr val="accent1"/>
+          </a:effectRef>
+          <a:fontRef idx="minor">
+            <a:schemeClr val="lt1"/>
+          </a:fontRef>
+        </p:style>
+        <p:txBody>
+          <a:bodyPr rtlCol="0" anchor="ctr"/>
+          <a:lstStyle/>
+          <a:p>
+            <a:pPr algn="ctr"/>
+            <a:r>
+              <a:rPr lang="en-US" dirty="0" err="1">
+                <a:solidFill>
+                  <a:schemeClr val="tx1"/>
+                </a:solidFill>
+              </a:rPr>
+              <a:t>MemriCore</a:t>
+            </a:r>
+            <a:endParaRPr lang="ru-RU" dirty="0">
+              <a:solidFill>
+                <a:schemeClr val="tx1"/>
+              </a:solidFill>
+            </a:endParaRPr>
+          </a:p>
+        </p:txBody>
+      </p:sp>
+      <p:sp>
+        <p:nvSpPr>
+          <p:cNvPr id="40" name="TextBox 39">
+            <a:extLst>
+              <a:ext uri="{FF2B5EF4-FFF2-40B4-BE49-F238E27FC236}">
+                <a16:creationId xmlns:a16="http://schemas.microsoft.com/office/drawing/2014/main" id="{1785FE40-4313-9C69-3543-587F19543D3C}"/>
+              </a:ext>
+            </a:extLst>
+          </p:cNvPr>
+          <p:cNvSpPr txBox="1"/>
+          <p:nvPr/>
+        </p:nvSpPr>
+        <p:spPr>
+          <a:xfrm>
+            <a:off x="9498923" y="1259628"/>
+            <a:ext cx="1837380" cy="369332"/>
+          </a:xfrm>
+          <a:prstGeom prst="rect">
+            <a:avLst/>
+          </a:prstGeom>
+          <a:noFill/>
+        </p:spPr>
+        <p:txBody>
+          <a:bodyPr wrap="square">
+            <a:spAutoFit/>
+          </a:bodyPr>
+          <a:lstStyle/>
+          <a:p>
+            <a:r>
+              <a:rPr lang="en" dirty="0"/>
+              <a:t>2. conn</a:t>
+            </a:r>
+            <a:endParaRPr lang="ru-RU" dirty="0"/>
+          </a:p>
+        </p:txBody>
+      </p:sp>
+      <p:sp>
+        <p:nvSpPr>
+          <p:cNvPr id="41" name="TextBox 40">
+            <a:extLst>
+              <a:ext uri="{FF2B5EF4-FFF2-40B4-BE49-F238E27FC236}">
+                <a16:creationId xmlns:a16="http://schemas.microsoft.com/office/drawing/2014/main" id="{DE753DCE-847C-6BC4-2EFE-13A31757BFE7}"/>
+              </a:ext>
+            </a:extLst>
+          </p:cNvPr>
+          <p:cNvSpPr txBox="1"/>
+          <p:nvPr/>
+        </p:nvSpPr>
+        <p:spPr>
+          <a:xfrm>
+            <a:off x="10407886" y="2162450"/>
+            <a:ext cx="1370247" cy="1200329"/>
+          </a:xfrm>
+          <a:prstGeom prst="rect">
+            <a:avLst/>
+          </a:prstGeom>
+          <a:noFill/>
+        </p:spPr>
+        <p:txBody>
+          <a:bodyPr wrap="none" rtlCol="0">
+            <a:spAutoFit/>
+          </a:bodyPr>
+          <a:lstStyle/>
+          <a:p>
+            <a:r>
+              <a:rPr lang="en-US" dirty="0"/>
+              <a:t>mode_7,</a:t>
+            </a:r>
+          </a:p>
+          <a:p>
+            <a:r>
+              <a:rPr lang="en-US" dirty="0"/>
+              <a:t>mode_9,</a:t>
+            </a:r>
+          </a:p>
+          <a:p>
+            <a:r>
+              <a:rPr lang="en-US" dirty="0" err="1"/>
+              <a:t>mode_mvm</a:t>
+            </a:r>
+            <a:r>
+              <a:rPr lang="en-US" dirty="0"/>
+              <a:t>,</a:t>
+            </a:r>
+          </a:p>
+          <a:p>
+            <a:r>
+              <a:rPr lang="en-US" dirty="0" err="1"/>
+              <a:t>mode_core</a:t>
+            </a:r>
+            <a:endParaRPr lang="ru-RU" dirty="0"/>
+          </a:p>
+        </p:txBody>
+      </p:sp>
+      <p:sp>
+        <p:nvSpPr>
+          <p:cNvPr id="42" name="Несколько документов 41">
+            <a:extLst>
+              <a:ext uri="{FF2B5EF4-FFF2-40B4-BE49-F238E27FC236}">
+                <a16:creationId xmlns:a16="http://schemas.microsoft.com/office/drawing/2014/main" id="{CE17BBA9-8E5A-5ECC-7CAC-8E4BDC509A7C}"/>
+              </a:ext>
+            </a:extLst>
+          </p:cNvPr>
+          <p:cNvSpPr/>
+          <p:nvPr/>
+        </p:nvSpPr>
+        <p:spPr>
+          <a:xfrm>
+            <a:off x="7661543" y="969533"/>
+            <a:ext cx="1837380" cy="1460310"/>
+          </a:xfrm>
+          <a:prstGeom prst="flowChartMultidocument">
+            <a:avLst/>
+          </a:prstGeom>
+          <a:solidFill>
+            <a:schemeClr val="accent4">
+              <a:lumMod val="20000"/>
+              <a:lumOff val="80000"/>
+            </a:schemeClr>
+          </a:solidFill>
+        </p:spPr>
+        <p:style>
+          <a:lnRef idx="2">
+            <a:schemeClr val="accent1">
+              <a:shade val="15000"/>
+            </a:schemeClr>
+          </a:lnRef>
+          <a:fillRef idx="1">
+            <a:schemeClr val="accent1"/>
+          </a:fillRef>
+          <a:effectRef idx="0">
+            <a:schemeClr val="accent1"/>
+          </a:effectRef>
+          <a:fontRef idx="minor">
+            <a:schemeClr val="lt1"/>
+          </a:fontRef>
+        </p:style>
+        <p:txBody>
+          <a:bodyPr rtlCol="0" anchor="ctr"/>
+          <a:lstStyle/>
+          <a:p>
+            <a:pPr algn="ctr"/>
+            <a:r>
+              <a:rPr lang="en-US" dirty="0">
+                <a:solidFill>
+                  <a:schemeClr val="tx1"/>
+                </a:solidFill>
+              </a:rPr>
+              <a:t>cores</a:t>
+            </a:r>
+            <a:endParaRPr lang="ru-RU" dirty="0">
+              <a:solidFill>
+                <a:schemeClr val="tx1"/>
+              </a:solidFill>
+            </a:endParaRPr>
+          </a:p>
+        </p:txBody>
+      </p:sp>
+      <p:cxnSp>
+        <p:nvCxnSpPr>
+          <p:cNvPr id="44" name="Прямая со стрелкой 43">
+            <a:extLst>
+              <a:ext uri="{FF2B5EF4-FFF2-40B4-BE49-F238E27FC236}">
+                <a16:creationId xmlns:a16="http://schemas.microsoft.com/office/drawing/2014/main" id="{DF150B0B-D2E2-3606-10BF-3A6309677846}"/>
+              </a:ext>
+            </a:extLst>
+          </p:cNvPr>
+          <p:cNvCxnSpPr>
+            <a:cxnSpLocks/>
+            <a:stCxn id="36" idx="1"/>
+            <a:endCxn id="42" idx="3"/>
+          </p:cNvCxnSpPr>
+          <p:nvPr/>
+        </p:nvCxnSpPr>
+        <p:spPr>
+          <a:xfrm flipH="1">
+            <a:off x="9498923" y="1693454"/>
+            <a:ext cx="918688" cy="6234"/>
+          </a:xfrm>
+          <a:prstGeom prst="straightConnector1">
+            <a:avLst/>
+          </a:prstGeom>
+          <a:ln w="38100">
+            <a:tailEnd type="triangle"/>
+          </a:ln>
+        </p:spPr>
+        <p:style>
+          <a:lnRef idx="1">
+            <a:schemeClr val="accent1"/>
+          </a:lnRef>
+          <a:fillRef idx="0">
+            <a:schemeClr val="accent1"/>
+          </a:fillRef>
+          <a:effectRef idx="0">
+            <a:schemeClr val="accent1"/>
+          </a:effectRef>
+          <a:fontRef idx="minor">
+            <a:schemeClr val="tx1"/>
+          </a:fontRef>
+        </p:style>
+      </p:cxnSp>
+      <p:cxnSp>
+        <p:nvCxnSpPr>
+          <p:cNvPr id="48" name="Прямая со стрелкой 47">
+            <a:extLst>
+              <a:ext uri="{FF2B5EF4-FFF2-40B4-BE49-F238E27FC236}">
+                <a16:creationId xmlns:a16="http://schemas.microsoft.com/office/drawing/2014/main" id="{DB9B5CD8-09E0-80D8-C0B9-24A2623183F0}"/>
+              </a:ext>
+            </a:extLst>
+          </p:cNvPr>
+          <p:cNvCxnSpPr>
+            <a:cxnSpLocks/>
+            <a:stCxn id="42" idx="2"/>
+            <a:endCxn id="35" idx="0"/>
+          </p:cNvCxnSpPr>
+          <p:nvPr/>
+        </p:nvCxnSpPr>
+        <p:spPr>
+          <a:xfrm flipH="1">
+            <a:off x="8449317" y="2374541"/>
+            <a:ext cx="3150" cy="786865"/>
+          </a:xfrm>
+          <a:prstGeom prst="straightConnector1">
+            <a:avLst/>
+          </a:prstGeom>
+          <a:ln w="38100">
+            <a:tailEnd type="triangle"/>
+          </a:ln>
+        </p:spPr>
+        <p:style>
+          <a:lnRef idx="1">
+            <a:schemeClr val="accent1"/>
+          </a:lnRef>
+          <a:fillRef idx="0">
+            <a:schemeClr val="accent1"/>
+          </a:fillRef>
+          <a:effectRef idx="0">
+            <a:schemeClr val="accent1"/>
+          </a:effectRef>
+          <a:fontRef idx="minor">
+            <a:schemeClr val="tx1"/>
+          </a:fontRef>
+        </p:style>
+      </p:cxnSp>
+      <p:sp>
+        <p:nvSpPr>
+          <p:cNvPr id="55" name="TextBox 54">
+            <a:extLst>
+              <a:ext uri="{FF2B5EF4-FFF2-40B4-BE49-F238E27FC236}">
+                <a16:creationId xmlns:a16="http://schemas.microsoft.com/office/drawing/2014/main" id="{C30B8B8E-062D-003A-2DEC-966308A7F86D}"/>
+              </a:ext>
+            </a:extLst>
+          </p:cNvPr>
+          <p:cNvSpPr txBox="1"/>
+          <p:nvPr/>
+        </p:nvSpPr>
+        <p:spPr>
+          <a:xfrm>
+            <a:off x="8449317" y="2516217"/>
+            <a:ext cx="1837380" cy="369332"/>
+          </a:xfrm>
+          <a:prstGeom prst="rect">
+            <a:avLst/>
+          </a:prstGeom>
+          <a:noFill/>
+        </p:spPr>
+        <p:txBody>
+          <a:bodyPr wrap="square">
+            <a:spAutoFit/>
+          </a:bodyPr>
+          <a:lstStyle/>
+          <a:p>
+            <a:r>
+              <a:rPr lang="ru-RU" dirty="0"/>
+              <a:t>3</a:t>
+            </a:r>
+            <a:r>
+              <a:rPr lang="en-US" dirty="0"/>
+              <a:t>. device</a:t>
+            </a:r>
+            <a:endParaRPr lang="ru-RU" dirty="0"/>
+          </a:p>
+        </p:txBody>
+      </p:sp>
+      <p:sp>
+        <p:nvSpPr>
+          <p:cNvPr id="56" name="TextBox 55">
+            <a:extLst>
+              <a:ext uri="{FF2B5EF4-FFF2-40B4-BE49-F238E27FC236}">
+                <a16:creationId xmlns:a16="http://schemas.microsoft.com/office/drawing/2014/main" id="{48CE9846-0E1E-3485-8D1A-712673074F50}"/>
+              </a:ext>
+            </a:extLst>
+          </p:cNvPr>
+          <p:cNvSpPr txBox="1"/>
+          <p:nvPr/>
+        </p:nvSpPr>
+        <p:spPr>
+          <a:xfrm>
+            <a:off x="6289719" y="3482859"/>
+            <a:ext cx="1837380" cy="369332"/>
+          </a:xfrm>
+          <a:prstGeom prst="rect">
+            <a:avLst/>
+          </a:prstGeom>
+          <a:noFill/>
+        </p:spPr>
+        <p:txBody>
+          <a:bodyPr wrap="square">
+            <a:spAutoFit/>
+          </a:bodyPr>
+          <a:lstStyle/>
+          <a:p>
+            <a:r>
+              <a:rPr lang="en-US" dirty="0"/>
+              <a:t>4. </a:t>
+            </a:r>
+            <a:r>
+              <a:rPr lang="en-US" dirty="0" err="1"/>
+              <a:t>matmul</a:t>
+            </a:r>
+            <a:endParaRPr lang="ru-RU" dirty="0"/>
+          </a:p>
+        </p:txBody>
+      </p:sp>
+      <p:cxnSp>
+        <p:nvCxnSpPr>
+          <p:cNvPr id="57" name="Прямая со стрелкой 56">
+            <a:extLst>
+              <a:ext uri="{FF2B5EF4-FFF2-40B4-BE49-F238E27FC236}">
+                <a16:creationId xmlns:a16="http://schemas.microsoft.com/office/drawing/2014/main" id="{E5A0976E-24A9-D235-9A39-7120FBEC9D9D}"/>
+              </a:ext>
+            </a:extLst>
+          </p:cNvPr>
+          <p:cNvCxnSpPr>
+            <a:cxnSpLocks/>
+            <a:stCxn id="35" idx="1"/>
+            <a:endCxn id="30" idx="3"/>
+          </p:cNvCxnSpPr>
+          <p:nvPr/>
+        </p:nvCxnSpPr>
+        <p:spPr>
+          <a:xfrm flipH="1">
+            <a:off x="6289719" y="3891561"/>
+            <a:ext cx="1114503" cy="4310"/>
+          </a:xfrm>
+          <a:prstGeom prst="straightConnector1">
+            <a:avLst/>
+          </a:prstGeom>
+          <a:ln w="38100">
+            <a:tailEnd type="triangle"/>
+          </a:ln>
+        </p:spPr>
+        <p:style>
+          <a:lnRef idx="1">
+            <a:schemeClr val="accent1"/>
+          </a:lnRef>
+          <a:fillRef idx="0">
+            <a:schemeClr val="accent1"/>
+          </a:fillRef>
+          <a:effectRef idx="0">
+            <a:schemeClr val="accent1"/>
+          </a:effectRef>
+          <a:fontRef idx="minor">
+            <a:schemeClr val="tx1"/>
+          </a:fontRef>
+        </p:style>
+      </p:cxnSp>
+      <p:sp>
+        <p:nvSpPr>
+          <p:cNvPr id="62" name="Альтернативный процесс 61">
+            <a:extLst>
+              <a:ext uri="{FF2B5EF4-FFF2-40B4-BE49-F238E27FC236}">
+                <a16:creationId xmlns:a16="http://schemas.microsoft.com/office/drawing/2014/main" id="{9430D7BE-D019-A2DC-A021-67C9D96AD75E}"/>
+              </a:ext>
+            </a:extLst>
+          </p:cNvPr>
+          <p:cNvSpPr/>
+          <p:nvPr/>
+        </p:nvSpPr>
+        <p:spPr>
+          <a:xfrm>
+            <a:off x="10407886" y="220647"/>
+            <a:ext cx="1595132" cy="899786"/>
+          </a:xfrm>
+          <a:prstGeom prst="flowChartAlternateProcess">
+            <a:avLst/>
+          </a:prstGeom>
+          <a:solidFill>
+            <a:schemeClr val="tx2">
+              <a:lumMod val="60000"/>
+              <a:lumOff val="40000"/>
+            </a:schemeClr>
+          </a:solidFill>
+        </p:spPr>
+        <p:style>
+          <a:lnRef idx="2">
+            <a:schemeClr val="accent1">
+              <a:shade val="15000"/>
+            </a:schemeClr>
+          </a:lnRef>
+          <a:fillRef idx="1">
+            <a:schemeClr val="accent1"/>
+          </a:fillRef>
+          <a:effectRef idx="0">
+            <a:schemeClr val="accent1"/>
+          </a:effectRef>
+          <a:fontRef idx="minor">
+            <a:schemeClr val="lt1"/>
+          </a:fontRef>
+        </p:style>
+        <p:txBody>
+          <a:bodyPr rtlCol="0" anchor="ctr"/>
+          <a:lstStyle/>
+          <a:p>
+            <a:pPr algn="ctr"/>
+            <a:r>
+              <a:rPr lang="en-US" dirty="0" err="1">
+                <a:solidFill>
+                  <a:schemeClr val="tx1"/>
+                </a:solidFill>
+              </a:rPr>
+              <a:t>MemriBoard</a:t>
+            </a:r>
+            <a:endParaRPr lang="ru-RU" dirty="0">
+              <a:solidFill>
+                <a:schemeClr val="tx1"/>
+              </a:solidFill>
+            </a:endParaRPr>
+          </a:p>
+        </p:txBody>
+      </p:sp>
+      <p:sp>
+        <p:nvSpPr>
+          <p:cNvPr id="67" name="TextBox 66">
+            <a:extLst>
+              <a:ext uri="{FF2B5EF4-FFF2-40B4-BE49-F238E27FC236}">
+                <a16:creationId xmlns:a16="http://schemas.microsoft.com/office/drawing/2014/main" id="{1DD74537-3C9C-B179-9FA9-A60E2F24183F}"/>
+              </a:ext>
+            </a:extLst>
+          </p:cNvPr>
+          <p:cNvSpPr txBox="1"/>
+          <p:nvPr/>
+        </p:nvSpPr>
+        <p:spPr>
+          <a:xfrm>
+            <a:off x="7238697" y="4732666"/>
+            <a:ext cx="6096000" cy="369332"/>
+          </a:xfrm>
+          <a:prstGeom prst="rect">
+            <a:avLst/>
+          </a:prstGeom>
+          <a:noFill/>
+        </p:spPr>
+        <p:txBody>
+          <a:bodyPr wrap="square">
+            <a:spAutoFit/>
+          </a:bodyPr>
+          <a:lstStyle/>
+          <a:p>
+            <a:r>
+              <a:rPr lang="en" dirty="0" err="1"/>
+              <a:t>ElementWiseMatMulLayer</a:t>
+            </a:r>
+            <a:endParaRPr lang="en" dirty="0"/>
+          </a:p>
+        </p:txBody>
+      </p:sp>
+      <p:cxnSp>
+        <p:nvCxnSpPr>
+          <p:cNvPr id="70" name="Соединительная линия уступом 69">
+            <a:extLst>
+              <a:ext uri="{FF2B5EF4-FFF2-40B4-BE49-F238E27FC236}">
+                <a16:creationId xmlns:a16="http://schemas.microsoft.com/office/drawing/2014/main" id="{3F5C66A3-9523-66B5-1BB2-103555C391DB}"/>
+              </a:ext>
+            </a:extLst>
+          </p:cNvPr>
+          <p:cNvCxnSpPr>
+            <a:cxnSpLocks/>
+            <a:stCxn id="62" idx="1"/>
+            <a:endCxn id="42" idx="0"/>
+          </p:cNvCxnSpPr>
+          <p:nvPr/>
+        </p:nvCxnSpPr>
+        <p:spPr>
+          <a:xfrm rot="10800000" flipV="1">
+            <a:off x="8706638" y="670539"/>
+            <a:ext cx="1701248" cy="298993"/>
+          </a:xfrm>
+          <a:prstGeom prst="bentConnector2">
+            <a:avLst/>
+          </a:prstGeom>
+          <a:ln w="38100">
+            <a:tailEnd type="triangle"/>
+          </a:ln>
+        </p:spPr>
+        <p:style>
+          <a:lnRef idx="1">
+            <a:schemeClr val="accent1"/>
+          </a:lnRef>
+          <a:fillRef idx="0">
+            <a:schemeClr val="accent1"/>
+          </a:fillRef>
+          <a:effectRef idx="0">
+            <a:schemeClr val="accent1"/>
+          </a:effectRef>
+          <a:fontRef idx="minor">
+            <a:schemeClr val="tx1"/>
+          </a:fontRef>
+        </p:style>
+      </p:cxnSp>
+      <p:sp>
+        <p:nvSpPr>
+          <p:cNvPr id="81" name="Память с прямым доступом 80">
+            <a:extLst>
+              <a:ext uri="{FF2B5EF4-FFF2-40B4-BE49-F238E27FC236}">
+                <a16:creationId xmlns:a16="http://schemas.microsoft.com/office/drawing/2014/main" id="{697D039D-C4B9-FFA0-7558-16266F33EE91}"/>
+              </a:ext>
+            </a:extLst>
+          </p:cNvPr>
+          <p:cNvSpPr/>
+          <p:nvPr/>
+        </p:nvSpPr>
+        <p:spPr>
+          <a:xfrm rot="16200000">
+            <a:off x="5054024" y="1134090"/>
+            <a:ext cx="969747" cy="942433"/>
+          </a:xfrm>
+          <a:prstGeom prst="flowChartMagneticDrum">
+            <a:avLst/>
+          </a:prstGeom>
+          <a:solidFill>
+            <a:schemeClr val="accent3"/>
+          </a:solidFill>
+        </p:spPr>
+        <p:style>
+          <a:lnRef idx="2">
+            <a:schemeClr val="accent1">
+              <a:shade val="15000"/>
+            </a:schemeClr>
+          </a:lnRef>
+          <a:fillRef idx="1">
+            <a:schemeClr val="accent1"/>
+          </a:fillRef>
+          <a:effectRef idx="0">
+            <a:schemeClr val="accent1"/>
+          </a:effectRef>
+          <a:fontRef idx="minor">
+            <a:schemeClr val="lt1"/>
+          </a:fontRef>
+        </p:style>
+        <p:txBody>
+          <a:bodyPr rtlCol="0" anchor="ctr"/>
+          <a:lstStyle/>
+          <a:p>
+            <a:pPr algn="ctr"/>
+            <a:endParaRPr lang="ru-RU"/>
+          </a:p>
+        </p:txBody>
+      </p:sp>
+      <p:sp>
+        <p:nvSpPr>
+          <p:cNvPr id="82" name="TextBox 81">
+            <a:extLst>
+              <a:ext uri="{FF2B5EF4-FFF2-40B4-BE49-F238E27FC236}">
+                <a16:creationId xmlns:a16="http://schemas.microsoft.com/office/drawing/2014/main" id="{DEDBBC3B-48E6-4EBF-5BA0-1EF0344658BF}"/>
+              </a:ext>
+            </a:extLst>
+          </p:cNvPr>
+          <p:cNvSpPr txBox="1"/>
+          <p:nvPr/>
+        </p:nvSpPr>
+        <p:spPr>
+          <a:xfrm>
+            <a:off x="4984576" y="697472"/>
+            <a:ext cx="1152751" cy="369332"/>
+          </a:xfrm>
+          <a:prstGeom prst="rect">
+            <a:avLst/>
+          </a:prstGeom>
+          <a:noFill/>
+        </p:spPr>
+        <p:txBody>
+          <a:bodyPr wrap="none" rtlCol="0">
+            <a:spAutoFit/>
+          </a:bodyPr>
+          <a:lstStyle/>
+          <a:p>
+            <a:r>
+              <a:rPr lang="en-US" dirty="0"/>
+              <a:t>Input data</a:t>
+            </a:r>
+            <a:endParaRPr lang="ru-RU" dirty="0"/>
+          </a:p>
+        </p:txBody>
+      </p:sp>
+      <p:cxnSp>
+        <p:nvCxnSpPr>
+          <p:cNvPr id="83" name="Прямая со стрелкой 82">
+            <a:extLst>
+              <a:ext uri="{FF2B5EF4-FFF2-40B4-BE49-F238E27FC236}">
+                <a16:creationId xmlns:a16="http://schemas.microsoft.com/office/drawing/2014/main" id="{BE3BAE45-B058-5936-092D-3B22D42108D8}"/>
+              </a:ext>
+            </a:extLst>
+          </p:cNvPr>
+          <p:cNvCxnSpPr>
+            <a:cxnSpLocks/>
+            <a:stCxn id="81" idx="1"/>
+            <a:endCxn id="30" idx="0"/>
+          </p:cNvCxnSpPr>
+          <p:nvPr/>
+        </p:nvCxnSpPr>
+        <p:spPr>
+          <a:xfrm>
+            <a:off x="5538898" y="2090180"/>
+            <a:ext cx="0" cy="551319"/>
+          </a:xfrm>
+          <a:prstGeom prst="straightConnector1">
+            <a:avLst/>
+          </a:prstGeom>
+          <a:ln w="38100">
+            <a:tailEnd type="triangle"/>
+          </a:ln>
+        </p:spPr>
+        <p:style>
+          <a:lnRef idx="1">
+            <a:schemeClr val="accent1"/>
+          </a:lnRef>
+          <a:fillRef idx="0">
+            <a:schemeClr val="accent1"/>
+          </a:fillRef>
+          <a:effectRef idx="0">
+            <a:schemeClr val="accent1"/>
+          </a:effectRef>
+          <a:fontRef idx="minor">
+            <a:schemeClr val="tx1"/>
+          </a:fontRef>
+        </p:style>
+      </p:cxnSp>
+      <p:sp>
+        <p:nvSpPr>
+          <p:cNvPr id="86" name="Память с прямым доступом 85">
+            <a:extLst>
+              <a:ext uri="{FF2B5EF4-FFF2-40B4-BE49-F238E27FC236}">
+                <a16:creationId xmlns:a16="http://schemas.microsoft.com/office/drawing/2014/main" id="{2C765125-DE8A-C18F-CBD3-0D501C6F11F0}"/>
+              </a:ext>
+            </a:extLst>
+          </p:cNvPr>
+          <p:cNvSpPr/>
+          <p:nvPr/>
+        </p:nvSpPr>
+        <p:spPr>
+          <a:xfrm rot="16200000">
+            <a:off x="5027211" y="5693666"/>
+            <a:ext cx="1023376" cy="942433"/>
+          </a:xfrm>
+          <a:prstGeom prst="flowChartMagneticDrum">
+            <a:avLst/>
+          </a:prstGeom>
+          <a:solidFill>
+            <a:schemeClr val="accent3"/>
+          </a:solidFill>
+        </p:spPr>
+        <p:style>
+          <a:lnRef idx="2">
+            <a:schemeClr val="accent1">
+              <a:shade val="15000"/>
+            </a:schemeClr>
+          </a:lnRef>
+          <a:fillRef idx="1">
+            <a:schemeClr val="accent1"/>
+          </a:fillRef>
+          <a:effectRef idx="0">
+            <a:schemeClr val="accent1"/>
+          </a:effectRef>
+          <a:fontRef idx="minor">
+            <a:schemeClr val="lt1"/>
+          </a:fontRef>
+        </p:style>
+        <p:txBody>
+          <a:bodyPr rtlCol="0" anchor="ctr"/>
+          <a:lstStyle/>
+          <a:p>
+            <a:pPr algn="ctr"/>
+            <a:endParaRPr lang="ru-RU"/>
+          </a:p>
+        </p:txBody>
+      </p:sp>
+      <p:cxnSp>
+        <p:nvCxnSpPr>
+          <p:cNvPr id="87" name="Прямая со стрелкой 86">
+            <a:extLst>
+              <a:ext uri="{FF2B5EF4-FFF2-40B4-BE49-F238E27FC236}">
+                <a16:creationId xmlns:a16="http://schemas.microsoft.com/office/drawing/2014/main" id="{F922D56C-181D-887E-FE23-883115E807DF}"/>
+              </a:ext>
+            </a:extLst>
+          </p:cNvPr>
+          <p:cNvCxnSpPr>
+            <a:cxnSpLocks/>
+            <a:stCxn id="30" idx="2"/>
+            <a:endCxn id="86" idx="4"/>
+          </p:cNvCxnSpPr>
+          <p:nvPr/>
+        </p:nvCxnSpPr>
+        <p:spPr>
+          <a:xfrm>
+            <a:off x="5538898" y="5150243"/>
+            <a:ext cx="2" cy="502952"/>
+          </a:xfrm>
+          <a:prstGeom prst="straightConnector1">
+            <a:avLst/>
+          </a:prstGeom>
+          <a:ln w="38100">
+            <a:tailEnd type="triangle"/>
+          </a:ln>
+        </p:spPr>
+        <p:style>
+          <a:lnRef idx="1">
+            <a:schemeClr val="accent1"/>
+          </a:lnRef>
+          <a:fillRef idx="0">
+            <a:schemeClr val="accent1"/>
+          </a:fillRef>
+          <a:effectRef idx="0">
+            <a:schemeClr val="accent1"/>
+          </a:effectRef>
+          <a:fontRef idx="minor">
+            <a:schemeClr val="tx1"/>
+          </a:fontRef>
+        </p:style>
+      </p:cxnSp>
+      <p:sp>
+        <p:nvSpPr>
+          <p:cNvPr id="93" name="TextBox 92">
+            <a:extLst>
+              <a:ext uri="{FF2B5EF4-FFF2-40B4-BE49-F238E27FC236}">
+                <a16:creationId xmlns:a16="http://schemas.microsoft.com/office/drawing/2014/main" id="{4F0CDFAB-D9E5-5D99-5777-4B15E8E107CE}"/>
+              </a:ext>
+            </a:extLst>
+          </p:cNvPr>
+          <p:cNvSpPr txBox="1"/>
+          <p:nvPr/>
+        </p:nvSpPr>
+        <p:spPr>
+          <a:xfrm>
+            <a:off x="6096000" y="5991603"/>
+            <a:ext cx="1324273" cy="369332"/>
+          </a:xfrm>
+          <a:prstGeom prst="rect">
+            <a:avLst/>
+          </a:prstGeom>
+          <a:noFill/>
+        </p:spPr>
+        <p:txBody>
+          <a:bodyPr wrap="none" rtlCol="0">
+            <a:spAutoFit/>
+          </a:bodyPr>
+          <a:lstStyle/>
+          <a:p>
+            <a:r>
+              <a:rPr lang="en-US" dirty="0"/>
+              <a:t>Output data</a:t>
+            </a:r>
+            <a:endParaRPr lang="ru-RU" dirty="0"/>
+          </a:p>
+        </p:txBody>
+      </p:sp>
+      <p:sp>
+        <p:nvSpPr>
+          <p:cNvPr id="11" name="TextBox 10">
+            <a:extLst>
+              <a:ext uri="{FF2B5EF4-FFF2-40B4-BE49-F238E27FC236}">
+                <a16:creationId xmlns:a16="http://schemas.microsoft.com/office/drawing/2014/main" id="{E39B9DDB-A7E7-1648-2ED7-2A477F4CA748}"/>
+              </a:ext>
+            </a:extLst>
+          </p:cNvPr>
+          <p:cNvSpPr txBox="1"/>
+          <p:nvPr/>
+        </p:nvSpPr>
+        <p:spPr>
+          <a:xfrm>
+            <a:off x="8937628" y="309083"/>
+            <a:ext cx="1627302" cy="369332"/>
+          </a:xfrm>
+          <a:prstGeom prst="rect">
+            <a:avLst/>
+          </a:prstGeom>
+          <a:noFill/>
+        </p:spPr>
+        <p:txBody>
+          <a:bodyPr wrap="square">
+            <a:spAutoFit/>
+          </a:bodyPr>
+          <a:lstStyle/>
+          <a:p>
+            <a:r>
+              <a:rPr lang="en" dirty="0"/>
+              <a:t>Application</a:t>
+            </a:r>
+            <a:endParaRPr lang="ru-RU" dirty="0"/>
+          </a:p>
+        </p:txBody>
+      </p:sp>
+    </p:spTree>
+    <p:extLst>
+      <p:ext uri="{BB962C8B-B14F-4D97-AF65-F5344CB8AC3E}">
+        <p14:creationId xmlns:p14="http://schemas.microsoft.com/office/powerpoint/2010/main" val="366205848"/>
+      </p:ext>
+    </p:extLst>
+  </p:cSld>
+  <p:clrMapOvr>
+    <a:masterClrMapping/>
+  </p:clrMapOvr>
+</p:sld>
+</file>
+
 <file path=ppt/theme/theme1.xml><?xml version="1.0" encoding="utf-8"?>
 <a:theme xmlns:a="http://schemas.openxmlformats.org/drawingml/2006/main" name="Тема Office">
   <a:themeElements>

--- a/docs/structure.pptx
+++ b/docs/structure.pptx
@@ -260,7 +260,7 @@
           <a:p>
             <a:fld id="{525C2619-F06C-3D42-8D48-5DBF955DAB6E}" type="datetimeFigureOut">
               <a:rPr lang="ru-RU" smtClean="0"/>
-              <a:t>25.05.2026</a:t>
+              <a:t>07.07.2026</a:t>
             </a:fld>
             <a:endParaRPr lang="ru-RU"/>
           </a:p>
@@ -458,7 +458,7 @@
           <a:p>
             <a:fld id="{525C2619-F06C-3D42-8D48-5DBF955DAB6E}" type="datetimeFigureOut">
               <a:rPr lang="ru-RU" smtClean="0"/>
-              <a:t>25.05.2026</a:t>
+              <a:t>07.07.2026</a:t>
             </a:fld>
             <a:endParaRPr lang="ru-RU"/>
           </a:p>
@@ -666,7 +666,7 @@
           <a:p>
             <a:fld id="{525C2619-F06C-3D42-8D48-5DBF955DAB6E}" type="datetimeFigureOut">
               <a:rPr lang="ru-RU" smtClean="0"/>
-              <a:t>25.05.2026</a:t>
+              <a:t>07.07.2026</a:t>
             </a:fld>
             <a:endParaRPr lang="ru-RU"/>
           </a:p>
@@ -864,7 +864,7 @@
           <a:p>
             <a:fld id="{525C2619-F06C-3D42-8D48-5DBF955DAB6E}" type="datetimeFigureOut">
               <a:rPr lang="ru-RU" smtClean="0"/>
-              <a:t>25.05.2026</a:t>
+              <a:t>07.07.2026</a:t>
             </a:fld>
             <a:endParaRPr lang="ru-RU"/>
           </a:p>
@@ -1139,7 +1139,7 @@
           <a:p>
             <a:fld id="{525C2619-F06C-3D42-8D48-5DBF955DAB6E}" type="datetimeFigureOut">
               <a:rPr lang="ru-RU" smtClean="0"/>
-              <a:t>25.05.2026</a:t>
+              <a:t>07.07.2026</a:t>
             </a:fld>
             <a:endParaRPr lang="ru-RU"/>
           </a:p>
@@ -1404,7 +1404,7 @@
           <a:p>
             <a:fld id="{525C2619-F06C-3D42-8D48-5DBF955DAB6E}" type="datetimeFigureOut">
               <a:rPr lang="ru-RU" smtClean="0"/>
-              <a:t>25.05.2026</a:t>
+              <a:t>07.07.2026</a:t>
             </a:fld>
             <a:endParaRPr lang="ru-RU"/>
           </a:p>
@@ -1816,7 +1816,7 @@
           <a:p>
             <a:fld id="{525C2619-F06C-3D42-8D48-5DBF955DAB6E}" type="datetimeFigureOut">
               <a:rPr lang="ru-RU" smtClean="0"/>
-              <a:t>25.05.2026</a:t>
+              <a:t>07.07.2026</a:t>
             </a:fld>
             <a:endParaRPr lang="ru-RU"/>
           </a:p>
@@ -1957,7 +1957,7 @@
           <a:p>
             <a:fld id="{525C2619-F06C-3D42-8D48-5DBF955DAB6E}" type="datetimeFigureOut">
               <a:rPr lang="ru-RU" smtClean="0"/>
-              <a:t>25.05.2026</a:t>
+              <a:t>07.07.2026</a:t>
             </a:fld>
             <a:endParaRPr lang="ru-RU"/>
           </a:p>
@@ -2070,7 +2070,7 @@
           <a:p>
             <a:fld id="{525C2619-F06C-3D42-8D48-5DBF955DAB6E}" type="datetimeFigureOut">
               <a:rPr lang="ru-RU" smtClean="0"/>
-              <a:t>25.05.2026</a:t>
+              <a:t>07.07.2026</a:t>
             </a:fld>
             <a:endParaRPr lang="ru-RU"/>
           </a:p>
@@ -2381,7 +2381,7 @@
           <a:p>
             <a:fld id="{525C2619-F06C-3D42-8D48-5DBF955DAB6E}" type="datetimeFigureOut">
               <a:rPr lang="ru-RU" smtClean="0"/>
-              <a:t>25.05.2026</a:t>
+              <a:t>07.07.2026</a:t>
             </a:fld>
             <a:endParaRPr lang="ru-RU"/>
           </a:p>
@@ -2669,7 +2669,7 @@
           <a:p>
             <a:fld id="{525C2619-F06C-3D42-8D48-5DBF955DAB6E}" type="datetimeFigureOut">
               <a:rPr lang="ru-RU" smtClean="0"/>
-              <a:t>25.05.2026</a:t>
+              <a:t>07.07.2026</a:t>
             </a:fld>
             <a:endParaRPr lang="ru-RU"/>
           </a:p>
@@ -2910,7 +2910,7 @@
           <a:p>
             <a:fld id="{525C2619-F06C-3D42-8D48-5DBF955DAB6E}" type="datetimeFigureOut">
               <a:rPr lang="ru-RU" smtClean="0"/>
-              <a:t>25.05.2026</a:t>
+              <a:t>07.07.2026</a:t>
             </a:fld>
             <a:endParaRPr lang="ru-RU"/>
           </a:p>
@@ -3865,7 +3865,7 @@
           <a:p>
             <a:r>
               <a:rPr lang="en" dirty="0"/>
-              <a:t>Flatten</a:t>
+              <a:t>Flatten, …</a:t>
             </a:r>
             <a:endParaRPr lang="ru-RU" dirty="0"/>
           </a:p>
@@ -4769,13 +4769,14 @@
           </a:p>
           <a:p>
             <a:r>
-              <a:rPr lang="ru-RU" dirty="0">
-                <a:highlight>
-                  <a:srgbClr val="FFFF00"/>
-                </a:highlight>
-              </a:rPr>
-              <a:t>Добавить слой из нескольких ядер!</a:t>
-            </a:r>
+              <a:rPr lang="en" dirty="0" err="1"/>
+              <a:t>SingleCrossbarMatMulLayer</a:t>
+            </a:r>
+            <a:r>
+              <a:rPr lang="en" dirty="0"/>
+              <a:t>, …</a:t>
+            </a:r>
+            <a:endParaRPr lang="ru-RU" dirty="0"/>
           </a:p>
         </p:txBody>
       </p:sp>
